--- a/dist/초1/체육·보건·안전/생활안전/초1_체육·보건·안전_생활안전_01_등하굣길과놀이안전_학생용.pptx
+++ b/dist/초1/체육·보건·안전/생활안전/초1_체육·보건·안전_생활안전_01_등하굣길과놀이안전_학생용.pptx
@@ -119,13 +119,13 @@
   <p:extLst>
     <p:ext uri="{521415D9-36F7-43E2-AB2F-B90AF26B5E84}">
       <p14:sectionLst xmlns:p14="http://schemas.microsoft.com/office/powerpoint/2010/main">
-        <p14:section name="도입" id="{6c75a0d0-eeff-e701-1bc4-b971bf06de34}">
+        <p14:section name="도입" id="{bfb9c203-f9f0-d804-a2f9-bbb221bb15d2}">
           <p14:sldIdLst>
             <p14:sldId id="256"/>
             <p14:sldId id="257"/>
           </p14:sldIdLst>
         </p14:section>
-        <p14:section name="개념" id="{e0e3d08b-2c81-8cab-fb9a-93bbe4329799}">
+        <p14:section name="개념" id="{1dc3400b-5a27-63c4-47cc-12e663cbf20d}">
           <p14:sldIdLst>
             <p14:sldId id="258"/>
             <p14:sldId id="261"/>
@@ -133,7 +133,7 @@
             <p14:sldId id="264"/>
           </p14:sldIdLst>
         </p14:section>
-        <p14:section name="연습" id="{23052aa9-ac47-67cf-63d7-36a0c49469f6}">
+        <p14:section name="연습" id="{2e8927e0-6776-5003-a2f8-f1eedd76a4ff}">
           <p14:sldIdLst>
             <p14:sldId id="259"/>
             <p14:sldId id="260"/>
@@ -141,29 +141,29 @@
             <p14:sldId id="265"/>
           </p14:sldIdLst>
         </p14:section>
-        <p14:section name="개념" id="{ff46cae5-45a6-d446-bdff-b286f039193b}">
+        <p14:section name="개념" id="{6c53fc23-4ec4-9e90-f562-b3d70f7d79bd}">
           <p14:sldIdLst/>
         </p14:section>
-        <p14:section name="연습" id="{f29b839f-fd24-495b-c742-47ac4a06a58c}">
+        <p14:section name="연습" id="{b21dc63b-203a-e041-bd85-6092334f1085}">
           <p14:sldIdLst/>
         </p14:section>
-        <p14:section name="개념" id="{b26f4367-7587-317f-0237-bed15bb33da6}">
+        <p14:section name="개념" id="{12d730bb-69ba-04cc-5f23-c8d3a1d8667e}">
           <p14:sldIdLst/>
         </p14:section>
-        <p14:section name="연습" id="{beadea65-b044-bc14-2370-3d33cc08ae94}">
+        <p14:section name="연습" id="{2964cfdf-b236-90da-e713-2d4bccab76cf}">
           <p14:sldIdLst/>
         </p14:section>
-        <p14:section name="확인" id="{f7ba35ea-52e4-5fe0-5a21-715d67e3fda4}">
+        <p14:section name="확인" id="{ffb8fa89-6c3c-bb67-0c3c-1da560c28a22}">
           <p14:sldIdLst>
             <p14:sldId id="266"/>
           </p14:sldIdLst>
         </p14:section>
-        <p14:section name="정리" id="{6982cbd8-89d1-ce98-fd1b-93877ce5fed7}">
+        <p14:section name="정리" id="{8c4828fd-92f9-94a8-7d53-93134a375cb4}">
           <p14:sldIdLst>
             <p14:sldId id="267"/>
           </p14:sldIdLst>
         </p14:section>
-        <p14:section name="보충" id="{10766a74-31cc-bc9e-ba06-f74fb888bb42}">
+        <p14:section name="보충" id="{1ef215ce-18af-1ce1-5c02-4500a38cfc92}">
           <p14:sldIdLst>
             <p14:sldId id="268"/>
           </p14:sldIdLst>
@@ -3518,7 +3518,24 @@
                 <a:ea typeface="맑은 고딕" pitchFamily="34" charset="-122"/>
                 <a:cs typeface="맑은 고딕" pitchFamily="34" charset="-120"/>
               </a:rPr>
-              <a:t>횡단보도 건너기를 보여 줘요.</a:t>
+              <a:t>횡단보도 건너기를</a:t>
+            </a:r>
+            <a:endParaRPr lang="ko-KR" sz="3200" dirty="0"/>
+          </a:p>
+          <a:p>
+            <a:pPr eaLnBrk="0" algn="l" indent="0" marL="0">
+              <a:buNone/>
+            </a:pPr>
+            <a:r>
+              <a:rPr lang="ko-KR" altLang="en-US" sz="3200" dirty="0">
+                <a:solidFill>
+                  <a:srgbClr val="1F2937"/>
+                </a:solidFill>
+                <a:latin typeface="맑은 고딕" pitchFamily="34" charset="0"/>
+                <a:ea typeface="맑은 고딕" pitchFamily="34" charset="-122"/>
+                <a:cs typeface="맑은 고딕" pitchFamily="34" charset="-120"/>
+              </a:rPr>
+              <a:t>보여 줘요.</a:t>
             </a:r>
             <a:endParaRPr lang="ko-KR" sz="3200" dirty="0"/>
           </a:p>
@@ -3604,7 +3621,24 @@
                 <a:ea typeface="맑은 고딕" pitchFamily="34" charset="-122"/>
                 <a:cs typeface="맑은 고딕" pitchFamily="34" charset="-120"/>
               </a:rPr>
-              <a:t>그네 탈 때 약속은?</a:t>
+              <a:t>그네 탈 때</a:t>
+            </a:r>
+            <a:endParaRPr lang="ko-KR" sz="3200" dirty="0"/>
+          </a:p>
+          <a:p>
+            <a:pPr eaLnBrk="0" algn="l" indent="0" marL="0">
+              <a:buNone/>
+            </a:pPr>
+            <a:r>
+              <a:rPr lang="ko-KR" altLang="en-US" sz="3200" dirty="0">
+                <a:solidFill>
+                  <a:srgbClr val="1F2937"/>
+                </a:solidFill>
+                <a:latin typeface="맑은 고딕" pitchFamily="34" charset="0"/>
+                <a:ea typeface="맑은 고딕" pitchFamily="34" charset="-122"/>
+                <a:cs typeface="맑은 고딕" pitchFamily="34" charset="-120"/>
+              </a:rPr>
+              <a:t>약속은?</a:t>
             </a:r>
             <a:endParaRPr lang="ko-KR" sz="3200" dirty="0"/>
           </a:p>
@@ -3690,7 +3724,24 @@
                 <a:ea typeface="맑은 고딕" pitchFamily="34" charset="-122"/>
                 <a:cs typeface="맑은 고딕" pitchFamily="34" charset="-120"/>
               </a:rPr>
-              <a:t>모르는 사람이 따라오래요.</a:t>
+              <a:t>모르는 사람이</a:t>
+            </a:r>
+            <a:endParaRPr lang="ko-KR" sz="3200" dirty="0"/>
+          </a:p>
+          <a:p>
+            <a:pPr eaLnBrk="0" algn="l" indent="0" marL="0">
+              <a:buNone/>
+            </a:pPr>
+            <a:r>
+              <a:rPr lang="ko-KR" altLang="en-US" sz="3200" dirty="0">
+                <a:solidFill>
+                  <a:srgbClr val="1F2937"/>
+                </a:solidFill>
+                <a:latin typeface="맑은 고딕" pitchFamily="34" charset="0"/>
+                <a:ea typeface="맑은 고딕" pitchFamily="34" charset="-122"/>
+                <a:cs typeface="맑은 고딕" pitchFamily="34" charset="-120"/>
+              </a:rPr>
+              <a:t>따라오래요.</a:t>
             </a:r>
             <a:endParaRPr lang="ko-KR" sz="3200" dirty="0"/>
           </a:p>
@@ -3776,7 +3827,24 @@
                 <a:ea typeface="맑은 고딕" pitchFamily="34" charset="-122"/>
                 <a:cs typeface="맑은 고딕" pitchFamily="34" charset="-120"/>
               </a:rPr>
-              <a:t>불이 나면 몇 번에 전화해요?</a:t>
+              <a:t>불이 나면</a:t>
+            </a:r>
+            <a:endParaRPr lang="ko-KR" sz="3200" dirty="0"/>
+          </a:p>
+          <a:p>
+            <a:pPr eaLnBrk="0" algn="l" indent="0" marL="0">
+              <a:buNone/>
+            </a:pPr>
+            <a:r>
+              <a:rPr lang="ko-KR" altLang="en-US" sz="3200" dirty="0">
+                <a:solidFill>
+                  <a:srgbClr val="1F2937"/>
+                </a:solidFill>
+                <a:latin typeface="맑은 고딕" pitchFamily="34" charset="0"/>
+                <a:ea typeface="맑은 고딕" pitchFamily="34" charset="-122"/>
+                <a:cs typeface="맑은 고딕" pitchFamily="34" charset="-120"/>
+              </a:rPr>
+              <a:t>몇 번에 전화해요?</a:t>
             </a:r>
             <a:endParaRPr lang="ko-KR" sz="3200" dirty="0"/>
           </a:p>
@@ -5261,26 +5329,24 @@
       </p:sp>
       <p:sp>
         <p:nvSpPr>
-          <p:cNvPr id="7" name="S02-card7"/>
+          <p:cNvPr id="7" name="S02-figure7" descr="빨간 신호등 불"/>
           <p:cNvSpPr/>
           <p:nvPr/>
         </p:nvSpPr>
         <p:spPr>
           <a:xfrm>
-            <a:off x="548640" y="2715768"/>
-            <a:ext cx="5362956" cy="2404872"/>
-          </a:xfrm>
-          <a:prstGeom prst="roundRect">
-            <a:avLst>
-              <a:gd name="adj" fmla="val 4563"/>
-            </a:avLst>
+            <a:off x="2462923" y="2891548"/>
+            <a:ext cx="1534391" cy="1534391"/>
+          </a:xfrm>
+          <a:prstGeom prst="ellipse">
+            <a:avLst/>
           </a:prstGeom>
           <a:solidFill>
-            <a:srgbClr val="EAF3F1"/>
+            <a:srgbClr val="C8434E"/>
           </a:solidFill>
-          <a:ln w="12700">
+          <a:ln w="25400">
             <a:solidFill>
-              <a:srgbClr val="EAF3F1"/>
+              <a:srgbClr val="1F2937"/>
             </a:solidFill>
             <a:prstDash val="solid"/>
           </a:ln>
@@ -5288,14 +5354,14 @@
       </p:sp>
       <p:sp>
         <p:nvSpPr>
-          <p:cNvPr id="8" name="S02-cardtext8"/>
+          <p:cNvPr id="8" name="S02-label8"/>
           <p:cNvSpPr txBox="1"/>
           <p:nvPr/>
         </p:nvSpPr>
         <p:spPr>
           <a:xfrm>
-            <a:off x="822960" y="2852928"/>
-            <a:ext cx="4814316" cy="2130552"/>
+            <a:off x="548640" y="4674870"/>
+            <a:ext cx="5362956" cy="445770"/>
           </a:xfrm>
           <a:prstGeom prst="rect">
             <a:avLst/>
@@ -5307,14 +5373,11 @@
           <a:bodyPr wrap="square" lIns="0" tIns="0" rIns="0" bIns="0" rtlCol="0" anchor="ctr"/>
           <a:lstStyle/>
           <a:p>
-            <a:pPr eaLnBrk="0" indent="0" marL="0">
-              <a:spcAft>
-                <a:spcPts val="600"/>
-              </a:spcAft>
-              <a:buNone/>
-            </a:pPr>
-            <a:r>
-              <a:rPr lang="ko-KR" altLang="en-US" sz="3200" dirty="0">
+            <a:pPr eaLnBrk="0" algn="ctr" indent="0" marL="0">
+              <a:buNone/>
+            </a:pPr>
+            <a:r>
+              <a:rPr lang="ko-KR" altLang="en-US" sz="2600" b="1" dirty="0">
                 <a:solidFill>
                   <a:srgbClr val="1F2937"/>
                 </a:solidFill>
@@ -5324,7 +5387,7 @@
               </a:rPr>
               <a:t>빨간불</a:t>
             </a:r>
-            <a:endParaRPr lang="ko-KR" sz="3200" dirty="0"/>
+            <a:endParaRPr lang="ko-KR" sz="2600" dirty="0"/>
           </a:p>
         </p:txBody>
       </p:sp>
@@ -5377,26 +5440,24 @@
       </p:sp>
       <p:sp>
         <p:nvSpPr>
-          <p:cNvPr id="10" name="S02-card10"/>
+          <p:cNvPr id="10" name="S02-figure10" descr="초록 신호등 불"/>
           <p:cNvSpPr/>
           <p:nvPr/>
         </p:nvSpPr>
         <p:spPr>
           <a:xfrm>
-            <a:off x="6277356" y="2715768"/>
-            <a:ext cx="5362956" cy="2404872"/>
-          </a:xfrm>
-          <a:prstGeom prst="roundRect">
-            <a:avLst>
-              <a:gd name="adj" fmla="val 4563"/>
-            </a:avLst>
+            <a:off x="8191639" y="2891548"/>
+            <a:ext cx="1534391" cy="1534391"/>
+          </a:xfrm>
+          <a:prstGeom prst="ellipse">
+            <a:avLst/>
           </a:prstGeom>
           <a:solidFill>
-            <a:srgbClr val="EAF3F1"/>
+            <a:srgbClr val="2A9D8F"/>
           </a:solidFill>
-          <a:ln w="12700">
+          <a:ln w="25400">
             <a:solidFill>
-              <a:srgbClr val="EAF3F1"/>
+              <a:srgbClr val="1F2937"/>
             </a:solidFill>
             <a:prstDash val="solid"/>
           </a:ln>
@@ -5404,14 +5465,14 @@
       </p:sp>
       <p:sp>
         <p:nvSpPr>
-          <p:cNvPr id="11" name="S02-cardtext11"/>
+          <p:cNvPr id="11" name="S02-label11"/>
           <p:cNvSpPr txBox="1"/>
           <p:nvPr/>
         </p:nvSpPr>
         <p:spPr>
           <a:xfrm>
-            <a:off x="6551676" y="2852928"/>
-            <a:ext cx="4814316" cy="2130552"/>
+            <a:off x="6277356" y="4674870"/>
+            <a:ext cx="5362956" cy="445770"/>
           </a:xfrm>
           <a:prstGeom prst="rect">
             <a:avLst/>
@@ -5423,14 +5484,11 @@
           <a:bodyPr wrap="square" lIns="0" tIns="0" rIns="0" bIns="0" rtlCol="0" anchor="ctr"/>
           <a:lstStyle/>
           <a:p>
-            <a:pPr eaLnBrk="0" indent="0" marL="0">
-              <a:spcAft>
-                <a:spcPts val="600"/>
-              </a:spcAft>
-              <a:buNone/>
-            </a:pPr>
-            <a:r>
-              <a:rPr lang="ko-KR" altLang="en-US" sz="3200" dirty="0">
+            <a:pPr eaLnBrk="0" algn="ctr" indent="0" marL="0">
+              <a:buNone/>
+            </a:pPr>
+            <a:r>
+              <a:rPr lang="ko-KR" altLang="en-US" sz="2600" b="1" dirty="0">
                 <a:solidFill>
                   <a:srgbClr val="1F2937"/>
                 </a:solidFill>
@@ -5440,7 +5498,7 @@
               </a:rPr>
               <a:t>초록불</a:t>
             </a:r>
-            <a:endParaRPr lang="ko-KR" sz="3200" dirty="0"/>
+            <a:endParaRPr lang="ko-KR" sz="2600" dirty="0"/>
           </a:p>
         </p:txBody>
       </p:sp>
